--- a/ゲーム科2年/00_前期/ゲームエンジンⅢ/Unity_HDRP/02_レイトレーシング.pptx
+++ b/ゲーム科2年/00_前期/ゲームエンジンⅢ/Unity_HDRP/02_レイトレーシング.pptx
@@ -277,7 +277,7 @@
           <a:p>
             <a:fld id="{E9CC885B-4903-4D54-9A93-00025F12DED9}" type="datetimeFigureOut">
               <a:rPr kumimoji="1" lang="ja-JP" altLang="en-US" smtClean="0"/>
-              <a:t>2026/1/7</a:t>
+              <a:t>2026/1/9</a:t>
             </a:fld>
             <a:endParaRPr kumimoji="1" lang="ja-JP" altLang="en-US"/>
           </a:p>
@@ -507,7 +507,7 @@
           <a:p>
             <a:fld id="{E9CC885B-4903-4D54-9A93-00025F12DED9}" type="datetimeFigureOut">
               <a:rPr kumimoji="1" lang="ja-JP" altLang="en-US" smtClean="0"/>
-              <a:t>2026/1/7</a:t>
+              <a:t>2026/1/9</a:t>
             </a:fld>
             <a:endParaRPr kumimoji="1" lang="ja-JP" altLang="en-US"/>
           </a:p>
@@ -747,7 +747,7 @@
           <a:p>
             <a:fld id="{E9CC885B-4903-4D54-9A93-00025F12DED9}" type="datetimeFigureOut">
               <a:rPr kumimoji="1" lang="ja-JP" altLang="en-US" smtClean="0"/>
-              <a:t>2026/1/7</a:t>
+              <a:t>2026/1/9</a:t>
             </a:fld>
             <a:endParaRPr kumimoji="1" lang="ja-JP" altLang="en-US"/>
           </a:p>
@@ -977,7 +977,7 @@
           <a:p>
             <a:fld id="{E9CC885B-4903-4D54-9A93-00025F12DED9}" type="datetimeFigureOut">
               <a:rPr kumimoji="1" lang="ja-JP" altLang="en-US" smtClean="0"/>
-              <a:t>2026/1/7</a:t>
+              <a:t>2026/1/9</a:t>
             </a:fld>
             <a:endParaRPr kumimoji="1" lang="ja-JP" altLang="en-US"/>
           </a:p>
@@ -1252,7 +1252,7 @@
           <a:p>
             <a:fld id="{E9CC885B-4903-4D54-9A93-00025F12DED9}" type="datetimeFigureOut">
               <a:rPr kumimoji="1" lang="ja-JP" altLang="en-US" smtClean="0"/>
-              <a:t>2026/1/7</a:t>
+              <a:t>2026/1/9</a:t>
             </a:fld>
             <a:endParaRPr kumimoji="1" lang="ja-JP" altLang="en-US"/>
           </a:p>
@@ -1581,7 +1581,7 @@
           <a:p>
             <a:fld id="{E9CC885B-4903-4D54-9A93-00025F12DED9}" type="datetimeFigureOut">
               <a:rPr kumimoji="1" lang="ja-JP" altLang="en-US" smtClean="0"/>
-              <a:t>2026/1/7</a:t>
+              <a:t>2026/1/9</a:t>
             </a:fld>
             <a:endParaRPr kumimoji="1" lang="ja-JP" altLang="en-US"/>
           </a:p>
@@ -2057,7 +2057,7 @@
           <a:p>
             <a:fld id="{E9CC885B-4903-4D54-9A93-00025F12DED9}" type="datetimeFigureOut">
               <a:rPr kumimoji="1" lang="ja-JP" altLang="en-US" smtClean="0"/>
-              <a:t>2026/1/7</a:t>
+              <a:t>2026/1/9</a:t>
             </a:fld>
             <a:endParaRPr kumimoji="1" lang="ja-JP" altLang="en-US"/>
           </a:p>
@@ -2198,7 +2198,7 @@
           <a:p>
             <a:fld id="{E9CC885B-4903-4D54-9A93-00025F12DED9}" type="datetimeFigureOut">
               <a:rPr kumimoji="1" lang="ja-JP" altLang="en-US" smtClean="0"/>
-              <a:t>2026/1/7</a:t>
+              <a:t>2026/1/9</a:t>
             </a:fld>
             <a:endParaRPr kumimoji="1" lang="ja-JP" altLang="en-US"/>
           </a:p>
@@ -2311,7 +2311,7 @@
           <a:p>
             <a:fld id="{E9CC885B-4903-4D54-9A93-00025F12DED9}" type="datetimeFigureOut">
               <a:rPr kumimoji="1" lang="ja-JP" altLang="en-US" smtClean="0"/>
-              <a:t>2026/1/7</a:t>
+              <a:t>2026/1/9</a:t>
             </a:fld>
             <a:endParaRPr kumimoji="1" lang="ja-JP" altLang="en-US"/>
           </a:p>
@@ -2654,7 +2654,7 @@
           <a:p>
             <a:fld id="{E9CC885B-4903-4D54-9A93-00025F12DED9}" type="datetimeFigureOut">
               <a:rPr kumimoji="1" lang="ja-JP" altLang="en-US" smtClean="0"/>
-              <a:t>2026/1/7</a:t>
+              <a:t>2026/1/9</a:t>
             </a:fld>
             <a:endParaRPr kumimoji="1" lang="ja-JP" altLang="en-US"/>
           </a:p>
@@ -2942,7 +2942,7 @@
           <a:p>
             <a:fld id="{E9CC885B-4903-4D54-9A93-00025F12DED9}" type="datetimeFigureOut">
               <a:rPr kumimoji="1" lang="ja-JP" altLang="en-US" smtClean="0"/>
-              <a:t>2026/1/7</a:t>
+              <a:t>2026/1/9</a:t>
             </a:fld>
             <a:endParaRPr kumimoji="1" lang="ja-JP" altLang="en-US"/>
           </a:p>
@@ -3215,7 +3215,7 @@
           <a:p>
             <a:fld id="{E9CC885B-4903-4D54-9A93-00025F12DED9}" type="datetimeFigureOut">
               <a:rPr kumimoji="1" lang="ja-JP" altLang="en-US" smtClean="0"/>
-              <a:t>2026/1/7</a:t>
+              <a:t>2026/1/9</a:t>
             </a:fld>
             <a:endParaRPr kumimoji="1" lang="ja-JP" altLang="en-US"/>
           </a:p>
@@ -3756,7 +3756,7 @@
                   <a:srgbClr val="FF0000"/>
                 </a:solidFill>
               </a:rPr>
-              <a:t>配置されてあるオブジェクトを反射して映すことはありません。</a:t>
+              <a:t>周りに配置されてあるオブジェクトを反射して映すことはありません。</a:t>
             </a:r>
             <a:endParaRPr lang="en-US" altLang="ja-JP" sz="2400" b="1" dirty="0">
               <a:solidFill>
@@ -5055,7 +5055,7 @@
         <p:spPr>
           <a:xfrm>
             <a:off x="4663082" y="3510468"/>
-            <a:ext cx="5562741" cy="1569660"/>
+            <a:ext cx="6340197" cy="1569660"/>
           </a:xfrm>
           <a:prstGeom prst="rect">
             <a:avLst/>
@@ -5102,7 +5102,7 @@
           <a:p>
             <a:r>
               <a:rPr lang="ja-JP" altLang="en-US" sz="2400" dirty="0"/>
-              <a:t>空、影、ライトなど。</a:t>
+              <a:t>空、影、ライトなど様々な設定ができます。</a:t>
             </a:r>
             <a:endParaRPr kumimoji="1" lang="ja-JP" altLang="en-US" sz="2400" dirty="0"/>
           </a:p>
@@ -6118,7 +6118,7 @@
           <a:p>
             <a:r>
               <a:rPr kumimoji="1" lang="ja-JP" altLang="en-US" sz="2400" dirty="0"/>
-              <a:t>テクスチャ合成で見た目を補完したりなど、</a:t>
+              <a:t>シェーダーで見た目を補完したりなど、</a:t>
             </a:r>
             <a:endParaRPr kumimoji="1" lang="en-US" altLang="ja-JP" sz="2400" dirty="0"/>
           </a:p>
@@ -7328,7 +7328,7 @@
         <p:spPr>
           <a:xfrm>
             <a:off x="567542" y="1216429"/>
-            <a:ext cx="9110186" cy="1200329"/>
+            <a:ext cx="9417963" cy="1200329"/>
           </a:xfrm>
           <a:prstGeom prst="rect">
             <a:avLst/>
@@ -7350,7 +7350,43 @@
           <a:p>
             <a:r>
               <a:rPr kumimoji="1" lang="ja-JP" altLang="en-US" sz="2400" dirty="0"/>
-              <a:t>レイを複数分散させます。分散方向は反射や屈折など様々です。</a:t>
+              <a:t>レイを複数に</a:t>
+            </a:r>
+            <a:r>
+              <a:rPr kumimoji="1" lang="ja-JP" altLang="en-US" sz="2400" b="1" dirty="0">
+                <a:solidFill>
+                  <a:srgbClr val="FF0000"/>
+                </a:solidFill>
+              </a:rPr>
+              <a:t>分散</a:t>
+            </a:r>
+            <a:r>
+              <a:rPr kumimoji="1" lang="ja-JP" altLang="en-US" sz="2400" dirty="0"/>
+              <a:t>させます。分散方向は</a:t>
+            </a:r>
+            <a:r>
+              <a:rPr kumimoji="1" lang="ja-JP" altLang="en-US" sz="2400" b="1" dirty="0">
+                <a:solidFill>
+                  <a:srgbClr val="FF0000"/>
+                </a:solidFill>
+              </a:rPr>
+              <a:t>反射</a:t>
+            </a:r>
+            <a:r>
+              <a:rPr kumimoji="1" lang="ja-JP" altLang="en-US" sz="2400" dirty="0"/>
+              <a:t>や</a:t>
+            </a:r>
+            <a:r>
+              <a:rPr kumimoji="1" lang="ja-JP" altLang="en-US" sz="2400" b="1" dirty="0">
+                <a:solidFill>
+                  <a:srgbClr val="FF0000"/>
+                </a:solidFill>
+              </a:rPr>
+              <a:t>屈折</a:t>
+            </a:r>
+            <a:r>
+              <a:rPr kumimoji="1" lang="ja-JP" altLang="en-US" sz="2400" dirty="0"/>
+              <a:t>など様々です。</a:t>
             </a:r>
             <a:endParaRPr kumimoji="1" lang="en-US" altLang="ja-JP" sz="2400" dirty="0"/>
           </a:p>
